--- a/FINAL/HIVELET DEFENSE SLIDES.pptx
+++ b/FINAL/HIVELET DEFENSE SLIDES.pptx
@@ -793,7 +793,7 @@
           <a:p>
             <a:r>
               <a:rPr lang="en-US" dirty="0"/>
-              <a:t>Introduce the team and the client: a 33-unit boarding house in Legazpi City, 32 units occupied, run by the landlady for its owner.</a:t>
+              <a:t>Introduce the team and the client: a 33-unit boarding house in Legazpi City, 32 of them occupied, run by its owner.</a:t>
             </a:r>
             <a:endParaRPr lang="en-US" dirty="0"/>
           </a:p>

--- a/FINAL/HIVELET DEFENSE SLIDES.pptx
+++ b/FINAL/HIVELET DEFENSE SLIDES.pptx
@@ -199,10 +199,10 @@
                     <c:v>Security</c:v>
                   </c:pt>
                   <c:pt idx="3">
-                    <c:v>Compatibility</c:v>
+                    <c:v>Reliability</c:v>
                   </c:pt>
                   <c:pt idx="4">
-                    <c:v>Reliability</c:v>
+                    <c:v>Compatibility</c:v>
                   </c:pt>
                   <c:pt idx="5">
                     <c:v>Performance Efficiency</c:v>
@@ -224,28 +224,28 @@
                 <c:formatCode>General</c:formatCode>
                 <c:ptCount val="8"/>
                 <c:pt idx="0">
-                  <c:v>4.89</c:v>
+                  <c:v>4.86</c:v>
                 </c:pt>
                 <c:pt idx="1">
-                  <c:v>4.86</c:v>
+                  <c:v>4.79</c:v>
                 </c:pt>
                 <c:pt idx="2">
-                  <c:v>4.7</c:v>
+                  <c:v>4.68</c:v>
                 </c:pt>
                 <c:pt idx="3">
-                  <c:v>4.67</c:v>
+                  <c:v>4.61</c:v>
                 </c:pt>
                 <c:pt idx="4">
-                  <c:v>4.62</c:v>
+                  <c:v>4.55</c:v>
                 </c:pt>
                 <c:pt idx="5">
+                  <c:v>4.48</c:v>
+                </c:pt>
+                <c:pt idx="6">
                   <c:v>4.42</c:v>
                 </c:pt>
-                <c:pt idx="6">
-                  <c:v>4.12</c:v>
-                </c:pt>
                 <c:pt idx="7">
-                  <c:v>4</c:v>
+                  <c:v>4.32</c:v>
                 </c:pt>
               </c:numCache>
             </c:numRef>
@@ -1409,7 +1409,7 @@
           <a:p>
             <a:r>
               <a:rPr lang="en-US" dirty="0"/>
-              <a:t>Composite means (Table 4-17), mean of the group means. Six respondents: the owner, three tenants, a prospective tenant and a technical evaluator. Every characteristic at least High Quality.</a:t>
+              <a:t>Composite means (Table 4-17), mean of the group means. Ten respondents: the owner, three tenants, a prospective tenant and five technical evaluators. Every characteristic Very High Quality.</a:t>
             </a:r>
             <a:endParaRPr lang="en-US" dirty="0"/>
           </a:p>
@@ -1497,7 +1497,7 @@
           <a:p>
             <a:r>
               <a:rPr lang="en-US" dirty="0"/>
-              <a:t>Usability is the exception: the measures pass, but the owner rated learning without help lower. Maintainability rests on the measurements from the code more than on the one rating (Section 4.4.5).</a:t>
+              <a:t>Usability agrees once the later technical evaluators had rated it. The owner's two 3s still mark where a first-time user needs help (Section 4.4.5).</a:t>
             </a:r>
             <a:endParaRPr lang="en-US" dirty="0"/>
           </a:p>
@@ -6457,7 +6457,7 @@
                 <a:ea typeface="Arial" pitchFamily="34" charset="-122"/>
                 <a:cs typeface="Arial" pitchFamily="34" charset="-120"/>
               </a:rPr>
-              <a:t>owner's walkthrough steps passed</a:t>
+              <a:t>walkthrough steps the owner performed passed the first time</a:t>
             </a:r>
             <a:endParaRPr lang="en-US" sz="1300" dirty="0"/>
           </a:p>
@@ -6608,7 +6608,7 @@
                 <a:ea typeface="Arial" pitchFamily="34" charset="-122"/>
                 <a:cs typeface="Arial" pitchFamily="34" charset="-120"/>
               </a:rPr>
-              <a:t>ISO/IEC 25010 evaluation: 4.53, Very High Quality</a:t>
+              <a:t>ISO/IEC 25010 evaluation: 4.59, Very High Quality</a:t>
             </a:r>
             <a:endParaRPr lang="en-US" sz="2800" dirty="0"/>
           </a:p>
@@ -6736,7 +6736,7 @@
                 <a:ea typeface="Arial" pitchFamily="34" charset="-122"/>
                 <a:cs typeface="Arial" pitchFamily="34" charset="-120"/>
               </a:rPr>
-              <a:t>Measured and rated evidence agree on seven of eight</a:t>
+              <a:t>Measured and rated evidence agree on all eight</a:t>
             </a:r>
             <a:endParaRPr lang="en-US" sz="2800" dirty="0"/>
           </a:p>
@@ -6800,7 +6800,7 @@
                 <a:ea typeface="Arial" pitchFamily="34" charset="-122"/>
                 <a:cs typeface="Arial" pitchFamily="34" charset="-120"/>
               </a:rPr>
-              <a:t>Usability (4.12): every task done, but learning without help rated lower</a:t>
+              <a:t>Usability (4.42): nine tasks in ten done without help; the owner rated learning without help lower</a:t>
             </a:r>
             <a:endParaRPr lang="en-US" sz="2100" dirty="0"/>
           </a:p>
@@ -6821,7 +6821,7 @@
                 <a:ea typeface="Arial" pitchFamily="34" charset="-122"/>
                 <a:cs typeface="Arial" pitchFamily="34" charset="-120"/>
               </a:rPr>
-              <a:t>Maintainability (4.00): checks pass on every change, but three database calls in four sit inside the request handlers</a:t>
+              <a:t>Maintainability (4.32): checks pass on every change, but three database calls in four sit inside the request handlers</a:t>
             </a:r>
             <a:endParaRPr lang="en-US" sz="2100" dirty="0"/>
           </a:p>
@@ -6842,7 +6842,7 @@
                 <a:ea typeface="Arial" pitchFamily="34" charset="-122"/>
                 <a:cs typeface="Arial" pitchFamily="34" charset="-120"/>
               </a:rPr>
-              <a:t>The 14 comments of the technical evaluator were all acted on by 5 October</a:t>
+              <a:t>The 14 comments of 3 October were all acted on by 5 October</a:t>
             </a:r>
             <a:endParaRPr lang="en-US" sz="2100" dirty="0"/>
           </a:p>
@@ -7407,7 +7407,7 @@
                 <a:ea typeface="Arial" pitchFamily="34" charset="-122"/>
                 <a:cs typeface="Arial" pitchFamily="34" charset="-120"/>
               </a:rPr>
-              <a:t>Very High Quality overall (4.53) on ISO/IEC 25010; 51 optimizations made</a:t>
+              <a:t>Very High Quality overall (4.59) on ISO/IEC 25010; 51 optimizations made</a:t>
             </a:r>
             <a:endParaRPr lang="en-US" sz="1900" dirty="0"/>
           </a:p>
